--- a/poc/Ascension Network Services Knowledge Graph.pptx
+++ b/poc/Ascension Network Services Knowledge Graph.pptx
@@ -1885,6 +1885,7 @@
 </file>
 
 <file path=ppt/slides/slide10.xml><?xml version="1.0" encoding="utf-8"?>
+<!-- AI-CHANGE-CONSOLE-POC-SLIDE -->
 <p:sld xmlns:a="http://schemas.openxmlformats.org/drawingml/2006/main" xmlns:r="http://schemas.openxmlformats.org/officeDocument/2006/relationships" xmlns:p="http://schemas.openxmlformats.org/presentationml/2006/main">
   <p:cSld>
     <p:bg>
@@ -2956,7 +2957,7 @@
           <a:p>
             <a:pPr marL="0" indent="0" algn="l">
               <a:lnSpc>
-                <a:spcPct val="1300"/>
+                <a:spcPct val="130000"/>
               </a:lnSpc>
               <a:buNone/>
             </a:pPr>
@@ -3066,7 +3067,7 @@
           <a:p>
             <a:pPr marL="0" indent="0" algn="l">
               <a:lnSpc>
-                <a:spcPct val="1300"/>
+                <a:spcPct val="130000"/>
               </a:lnSpc>
               <a:buNone/>
             </a:pPr>
@@ -3245,7 +3246,7 @@
           <a:p>
             <a:pPr marL="0" indent="0" algn="l">
               <a:lnSpc>
-                <a:spcPct val="1300"/>
+                <a:spcPct val="130000"/>
               </a:lnSpc>
               <a:buNone/>
             </a:pPr>
@@ -3272,6 +3273,7 @@
 </file>
 
 <file path=ppt/slides/slide11.xml><?xml version="1.0" encoding="utf-8"?>
+<!-- AI-CHANGE-CONSOLE-POC-SLIDE -->
 <p:sld xmlns:a="http://schemas.openxmlformats.org/drawingml/2006/main" xmlns:r="http://schemas.openxmlformats.org/officeDocument/2006/relationships" xmlns:p="http://schemas.openxmlformats.org/presentationml/2006/main">
   <p:cSld>
     <p:bg>
@@ -3569,7 +3571,7 @@
           <a:p>
             <a:pPr marL="0" indent="0" algn="l">
               <a:lnSpc>
-                <a:spcPct val="1150"/>
+                <a:spcPct val="114999"/>
               </a:lnSpc>
               <a:buNone/>
             </a:pPr>
@@ -3610,7 +3612,7 @@
           <a:p>
             <a:pPr marL="0" indent="0" algn="l">
               <a:lnSpc>
-                <a:spcPct val="1280"/>
+                <a:spcPct val="128000"/>
               </a:lnSpc>
               <a:buNone/>
             </a:pPr>
@@ -3787,7 +3789,7 @@
           <a:p>
             <a:pPr marL="0" indent="0" algn="l">
               <a:lnSpc>
-                <a:spcPct val="1150"/>
+                <a:spcPct val="114999"/>
               </a:lnSpc>
               <a:buNone/>
             </a:pPr>
@@ -3828,7 +3830,7 @@
           <a:p>
             <a:pPr marL="0" indent="0" algn="l">
               <a:lnSpc>
-                <a:spcPct val="1280"/>
+                <a:spcPct val="128000"/>
               </a:lnSpc>
               <a:buNone/>
             </a:pPr>
@@ -4005,7 +4007,7 @@
           <a:p>
             <a:pPr marL="0" indent="0" algn="l">
               <a:lnSpc>
-                <a:spcPct val="1150"/>
+                <a:spcPct val="114999"/>
               </a:lnSpc>
               <a:buNone/>
             </a:pPr>
@@ -4046,7 +4048,7 @@
           <a:p>
             <a:pPr marL="0" indent="0" algn="l">
               <a:lnSpc>
-                <a:spcPct val="1280"/>
+                <a:spcPct val="128000"/>
               </a:lnSpc>
               <a:buNone/>
             </a:pPr>
@@ -4223,7 +4225,7 @@
           <a:p>
             <a:pPr marL="0" indent="0" algn="l">
               <a:lnSpc>
-                <a:spcPct val="1150"/>
+                <a:spcPct val="114999"/>
               </a:lnSpc>
               <a:buNone/>
             </a:pPr>
@@ -4264,7 +4266,7 @@
           <a:p>
             <a:pPr marL="0" indent="0" algn="l">
               <a:lnSpc>
-                <a:spcPct val="1280"/>
+                <a:spcPct val="128000"/>
               </a:lnSpc>
               <a:buNone/>
             </a:pPr>
@@ -4441,7 +4443,7 @@
           <a:p>
             <a:pPr marL="0" indent="0" algn="l">
               <a:lnSpc>
-                <a:spcPct val="1150"/>
+                <a:spcPct val="114999"/>
               </a:lnSpc>
               <a:buNone/>
             </a:pPr>
@@ -4482,7 +4484,7 @@
           <a:p>
             <a:pPr marL="0" indent="0" algn="l">
               <a:lnSpc>
-                <a:spcPct val="1280"/>
+                <a:spcPct val="128000"/>
               </a:lnSpc>
               <a:buNone/>
             </a:pPr>
@@ -4547,6 +4549,7 @@
 </file>
 
 <file path=ppt/slides/slide12.xml><?xml version="1.0" encoding="utf-8"?>
+<!-- AI-CHANGE-CONSOLE-POC-SLIDE -->
 <p:sld xmlns:a="http://schemas.openxmlformats.org/drawingml/2006/main" xmlns:r="http://schemas.openxmlformats.org/officeDocument/2006/relationships" xmlns:p="http://schemas.openxmlformats.org/presentationml/2006/main">
   <p:cSld>
     <p:bg>
@@ -4806,7 +4809,7 @@
           <a:p>
             <a:pPr marL="0" indent="0" algn="l">
               <a:lnSpc>
-                <a:spcPct val="1150"/>
+                <a:spcPct val="114999"/>
               </a:lnSpc>
               <a:buNone/>
             </a:pPr>
@@ -4847,7 +4850,7 @@
           <a:p>
             <a:pPr marL="0" indent="0" algn="l">
               <a:lnSpc>
-                <a:spcPct val="1280"/>
+                <a:spcPct val="128000"/>
               </a:lnSpc>
               <a:buNone/>
             </a:pPr>
@@ -4986,7 +4989,7 @@
           <a:p>
             <a:pPr marL="0" indent="0" algn="l">
               <a:lnSpc>
-                <a:spcPct val="1150"/>
+                <a:spcPct val="114999"/>
               </a:lnSpc>
               <a:buNone/>
             </a:pPr>
@@ -5027,7 +5030,7 @@
           <a:p>
             <a:pPr marL="0" indent="0" algn="l">
               <a:lnSpc>
-                <a:spcPct val="1280"/>
+                <a:spcPct val="128000"/>
               </a:lnSpc>
               <a:buNone/>
             </a:pPr>
@@ -5166,7 +5169,7 @@
           <a:p>
             <a:pPr marL="0" indent="0" algn="l">
               <a:lnSpc>
-                <a:spcPct val="1150"/>
+                <a:spcPct val="114999"/>
               </a:lnSpc>
               <a:buNone/>
             </a:pPr>
@@ -5207,7 +5210,7 @@
           <a:p>
             <a:pPr marL="0" indent="0" algn="l">
               <a:lnSpc>
-                <a:spcPct val="1280"/>
+                <a:spcPct val="128000"/>
               </a:lnSpc>
               <a:buNone/>
             </a:pPr>
@@ -5346,7 +5349,7 @@
           <a:p>
             <a:pPr marL="0" indent="0" algn="l">
               <a:lnSpc>
-                <a:spcPct val="1150"/>
+                <a:spcPct val="114999"/>
               </a:lnSpc>
               <a:buNone/>
             </a:pPr>
@@ -5387,7 +5390,7 @@
           <a:p>
             <a:pPr marL="0" indent="0" algn="l">
               <a:lnSpc>
-                <a:spcPct val="1280"/>
+                <a:spcPct val="128000"/>
               </a:lnSpc>
               <a:buNone/>
             </a:pPr>
@@ -5526,7 +5529,7 @@
           <a:p>
             <a:pPr marL="0" indent="0" algn="l">
               <a:lnSpc>
-                <a:spcPct val="1150"/>
+                <a:spcPct val="114999"/>
               </a:lnSpc>
               <a:buNone/>
             </a:pPr>
@@ -5567,7 +5570,7 @@
           <a:p>
             <a:pPr marL="0" indent="0" algn="l">
               <a:lnSpc>
-                <a:spcPct val="1280"/>
+                <a:spcPct val="128000"/>
               </a:lnSpc>
               <a:buNone/>
             </a:pPr>
@@ -5663,6 +5666,7 @@
 </file>
 
 <file path=ppt/slides/slide13.xml><?xml version="1.0" encoding="utf-8"?>
+<!-- AI-CHANGE-CONSOLE-POC-SLIDE -->
 <p:sld xmlns:a="http://schemas.openxmlformats.org/drawingml/2006/main" xmlns:r="http://schemas.openxmlformats.org/officeDocument/2006/relationships" xmlns:p="http://schemas.openxmlformats.org/presentationml/2006/main">
   <p:cSld>
     <p:bg>
@@ -5931,7 +5935,7 @@
           <a:p>
             <a:pPr marL="0" indent="0" algn="l">
               <a:lnSpc>
-                <a:spcPct val="1250"/>
+                <a:spcPct val="125000"/>
               </a:lnSpc>
               <a:buNone/>
             </a:pPr>
@@ -6079,7 +6083,7 @@
           <a:p>
             <a:pPr marL="0" indent="0" algn="l">
               <a:lnSpc>
-                <a:spcPct val="1250"/>
+                <a:spcPct val="125000"/>
               </a:lnSpc>
               <a:buNone/>
             </a:pPr>
@@ -6227,7 +6231,7 @@
           <a:p>
             <a:pPr marL="0" indent="0" algn="l">
               <a:lnSpc>
-                <a:spcPct val="1250"/>
+                <a:spcPct val="125000"/>
               </a:lnSpc>
               <a:buNone/>
             </a:pPr>
@@ -6337,7 +6341,7 @@
           <a:p>
             <a:pPr marL="0" indent="0" algn="l">
               <a:lnSpc>
-                <a:spcPct val="1300"/>
+                <a:spcPct val="130000"/>
               </a:lnSpc>
               <a:buNone/>
             </a:pPr>
@@ -6447,7 +6451,7 @@
           <a:p>
             <a:pPr marL="0" indent="0" algn="l">
               <a:lnSpc>
-                <a:spcPct val="1300"/>
+                <a:spcPct val="130000"/>
               </a:lnSpc>
               <a:buNone/>
             </a:pPr>
@@ -6512,6 +6516,7 @@
 </file>
 
 <file path=ppt/slides/slide14.xml><?xml version="1.0" encoding="utf-8"?>
+<!-- AI-CHANGE-CONSOLE-POC-SLIDE -->
 <p:sld xmlns:a="http://schemas.openxmlformats.org/drawingml/2006/main" xmlns:r="http://schemas.openxmlformats.org/officeDocument/2006/relationships" xmlns:p="http://schemas.openxmlformats.org/presentationml/2006/main">
   <p:cSld>
     <p:bg>
@@ -6811,7 +6816,7 @@
           <a:p>
             <a:pPr marL="0" indent="0" algn="l">
               <a:lnSpc>
-                <a:spcPct val="1300"/>
+                <a:spcPct val="130000"/>
               </a:lnSpc>
               <a:buNone/>
             </a:pPr>
@@ -6990,7 +6995,7 @@
           <a:p>
             <a:pPr marL="0" indent="0" algn="l">
               <a:lnSpc>
-                <a:spcPct val="1300"/>
+                <a:spcPct val="130000"/>
               </a:lnSpc>
               <a:buNone/>
             </a:pPr>
@@ -7680,7 +7685,7 @@
           <a:p>
             <a:pPr marL="0" indent="0" algn="l">
               <a:lnSpc>
-                <a:spcPct val="1250"/>
+                <a:spcPct val="125000"/>
               </a:lnSpc>
               <a:buNone/>
             </a:pPr>
@@ -7707,6 +7712,7 @@
 </file>
 
 <file path=ppt/slides/slide15.xml><?xml version="1.0" encoding="utf-8"?>
+<!-- AI-CHANGE-CONSOLE-POC-SLIDE -->
 <p:sld xmlns:a="http://schemas.openxmlformats.org/drawingml/2006/main" xmlns:r="http://schemas.openxmlformats.org/officeDocument/2006/relationships" xmlns:p="http://schemas.openxmlformats.org/presentationml/2006/main">
   <p:cSld>
     <p:bg>
@@ -8004,7 +8010,7 @@
           <a:p>
             <a:pPr marL="0" indent="0" algn="l">
               <a:lnSpc>
-                <a:spcPct val="1300"/>
+                <a:spcPct val="130000"/>
               </a:lnSpc>
               <a:buNone/>
             </a:pPr>
@@ -8181,7 +8187,7 @@
           <a:p>
             <a:pPr marL="0" indent="0" algn="l">
               <a:lnSpc>
-                <a:spcPct val="1300"/>
+                <a:spcPct val="130000"/>
               </a:lnSpc>
               <a:buNone/>
             </a:pPr>
@@ -8358,7 +8364,7 @@
           <a:p>
             <a:pPr marL="0" indent="0" algn="l">
               <a:lnSpc>
-                <a:spcPct val="1300"/>
+                <a:spcPct val="130000"/>
               </a:lnSpc>
               <a:buNone/>
             </a:pPr>
@@ -8535,7 +8541,7 @@
           <a:p>
             <a:pPr marL="0" indent="0" algn="l">
               <a:lnSpc>
-                <a:spcPct val="1300"/>
+                <a:spcPct val="130000"/>
               </a:lnSpc>
               <a:buNone/>
             </a:pPr>
@@ -8607,7 +8613,7 @@
           <a:p>
             <a:pPr marL="0" indent="0" algn="l">
               <a:lnSpc>
-                <a:spcPct val="1250"/>
+                <a:spcPct val="125000"/>
               </a:lnSpc>
               <a:buNone/>
             </a:pPr>
@@ -8634,6 +8640,7 @@
 </file>
 
 <file path=ppt/slides/slide16.xml><?xml version="1.0" encoding="utf-8"?>
+<!-- AI-CHANGE-CONSOLE-POC-SLIDE -->
 <p:sld xmlns:a="http://schemas.openxmlformats.org/drawingml/2006/main" xmlns:r="http://schemas.openxmlformats.org/officeDocument/2006/relationships" xmlns:p="http://schemas.openxmlformats.org/presentationml/2006/main">
   <p:cSld>
     <p:bg>
@@ -8864,7 +8871,7 @@
           <a:p>
             <a:pPr marL="0" indent="0" algn="ctr">
               <a:lnSpc>
-                <a:spcPct val="1150"/>
+                <a:spcPct val="114999"/>
               </a:lnSpc>
               <a:buNone/>
             </a:pPr>
@@ -9003,7 +9010,7 @@
           <a:p>
             <a:pPr marL="0" indent="0" algn="ctr">
               <a:lnSpc>
-                <a:spcPct val="1150"/>
+                <a:spcPct val="114999"/>
               </a:lnSpc>
               <a:buNone/>
             </a:pPr>
@@ -9142,7 +9149,7 @@
           <a:p>
             <a:pPr marL="0" indent="0" algn="ctr">
               <a:lnSpc>
-                <a:spcPct val="1150"/>
+                <a:spcPct val="114999"/>
               </a:lnSpc>
               <a:buNone/>
             </a:pPr>
@@ -9281,7 +9288,7 @@
           <a:p>
             <a:pPr marL="0" indent="0" algn="ctr">
               <a:lnSpc>
-                <a:spcPct val="1150"/>
+                <a:spcPct val="114999"/>
               </a:lnSpc>
               <a:buNone/>
             </a:pPr>
@@ -9391,7 +9398,7 @@
           <a:p>
             <a:pPr marL="0" indent="0" algn="l">
               <a:lnSpc>
-                <a:spcPct val="1300"/>
+                <a:spcPct val="130000"/>
               </a:lnSpc>
               <a:buNone/>
             </a:pPr>
@@ -9501,7 +9508,7 @@
           <a:p>
             <a:pPr marL="0" indent="0" algn="l">
               <a:lnSpc>
-                <a:spcPct val="1300"/>
+                <a:spcPct val="130000"/>
               </a:lnSpc>
               <a:buNone/>
             </a:pPr>
@@ -9649,7 +9656,7 @@
           <a:p>
             <a:pPr marL="0" indent="0" algn="l">
               <a:lnSpc>
-                <a:spcPct val="1300"/>
+                <a:spcPct val="130000"/>
               </a:lnSpc>
               <a:buNone/>
             </a:pPr>
@@ -9759,7 +9766,7 @@
           <a:p>
             <a:pPr marL="0" indent="0" algn="l">
               <a:lnSpc>
-                <a:spcPct val="1300"/>
+                <a:spcPct val="130000"/>
               </a:lnSpc>
               <a:buNone/>
             </a:pPr>
@@ -9786,6 +9793,7 @@
 </file>
 
 <file path=ppt/slides/slide17.xml><?xml version="1.0" encoding="utf-8"?>
+<!-- AI-CHANGE-CONSOLE-POC-SLIDE -->
 <p:sld xmlns:a="http://schemas.openxmlformats.org/drawingml/2006/main" xmlns:r="http://schemas.openxmlformats.org/officeDocument/2006/relationships" xmlns:p="http://schemas.openxmlformats.org/presentationml/2006/main">
   <p:cSld>
     <p:bg>
@@ -10114,7 +10122,7 @@
           <a:p>
             <a:pPr marL="0" indent="0" algn="l">
               <a:lnSpc>
-                <a:spcPct val="1280"/>
+                <a:spcPct val="128000"/>
               </a:lnSpc>
               <a:buNone/>
             </a:pPr>
@@ -10322,7 +10330,7 @@
           <a:p>
             <a:pPr marL="0" indent="0" algn="l">
               <a:lnSpc>
-                <a:spcPct val="1280"/>
+                <a:spcPct val="128000"/>
               </a:lnSpc>
               <a:buNone/>
             </a:pPr>
@@ -10530,7 +10538,7 @@
           <a:p>
             <a:pPr marL="0" indent="0" algn="l">
               <a:lnSpc>
-                <a:spcPct val="1280"/>
+                <a:spcPct val="128000"/>
               </a:lnSpc>
               <a:buNone/>
             </a:pPr>
@@ -10738,7 +10746,7 @@
           <a:p>
             <a:pPr marL="0" indent="0" algn="l">
               <a:lnSpc>
-                <a:spcPct val="1280"/>
+                <a:spcPct val="128000"/>
               </a:lnSpc>
               <a:buNone/>
             </a:pPr>
@@ -10946,7 +10954,7 @@
           <a:p>
             <a:pPr marL="0" indent="0" algn="l">
               <a:lnSpc>
-                <a:spcPct val="1280"/>
+                <a:spcPct val="128000"/>
               </a:lnSpc>
               <a:buNone/>
             </a:pPr>
@@ -11154,7 +11162,7 @@
           <a:p>
             <a:pPr marL="0" indent="0" algn="l">
               <a:lnSpc>
-                <a:spcPct val="1280"/>
+                <a:spcPct val="128000"/>
               </a:lnSpc>
               <a:buNone/>
             </a:pPr>
@@ -11226,7 +11234,7 @@
           <a:p>
             <a:pPr marL="0" indent="0" algn="l">
               <a:lnSpc>
-                <a:spcPct val="1300"/>
+                <a:spcPct val="130000"/>
               </a:lnSpc>
               <a:buNone/>
             </a:pPr>
@@ -11291,6 +11299,7 @@
 </file>
 
 <file path=ppt/slides/slide18.xml><?xml version="1.0" encoding="utf-8"?>
+<!-- AI-CHANGE-CONSOLE-POC-SLIDE -->
 <p:sld xmlns:a="http://schemas.openxmlformats.org/drawingml/2006/main" xmlns:r="http://schemas.openxmlformats.org/officeDocument/2006/relationships" xmlns:p="http://schemas.openxmlformats.org/presentationml/2006/main">
   <p:cSld>
     <p:bg>
@@ -11588,7 +11597,7 @@
           <a:p>
             <a:pPr marL="0" indent="0" algn="l">
               <a:lnSpc>
-                <a:spcPct val="1250"/>
+                <a:spcPct val="125000"/>
               </a:lnSpc>
               <a:buNone/>
             </a:pPr>
@@ -11698,7 +11707,7 @@
           <a:p>
             <a:pPr marL="0" indent="0" algn="l">
               <a:lnSpc>
-                <a:spcPct val="1250"/>
+                <a:spcPct val="125000"/>
               </a:lnSpc>
               <a:buNone/>
             </a:pPr>
@@ -11808,7 +11817,7 @@
           <a:p>
             <a:pPr marL="0" indent="0" algn="l">
               <a:lnSpc>
-                <a:spcPct val="1250"/>
+                <a:spcPct val="125000"/>
               </a:lnSpc>
               <a:buNone/>
             </a:pPr>
@@ -11918,7 +11927,7 @@
           <a:p>
             <a:pPr marL="0" indent="0" algn="l">
               <a:lnSpc>
-                <a:spcPct val="1250"/>
+                <a:spcPct val="125000"/>
               </a:lnSpc>
               <a:buNone/>
             </a:pPr>
@@ -12095,7 +12104,7 @@
           <a:p>
             <a:pPr marL="0" indent="0" algn="l">
               <a:lnSpc>
-                <a:spcPct val="1250"/>
+                <a:spcPct val="125000"/>
               </a:lnSpc>
               <a:buNone/>
             </a:pPr>
@@ -12205,7 +12214,7 @@
           <a:p>
             <a:pPr marL="0" indent="0" algn="l">
               <a:lnSpc>
-                <a:spcPct val="1250"/>
+                <a:spcPct val="125000"/>
               </a:lnSpc>
               <a:buNone/>
             </a:pPr>
@@ -12315,7 +12324,7 @@
           <a:p>
             <a:pPr marL="0" indent="0" algn="l">
               <a:lnSpc>
-                <a:spcPct val="1250"/>
+                <a:spcPct val="125000"/>
               </a:lnSpc>
               <a:buNone/>
             </a:pPr>
@@ -12425,7 +12434,7 @@
           <a:p>
             <a:pPr marL="0" indent="0" algn="l">
               <a:lnSpc>
-                <a:spcPct val="1250"/>
+                <a:spcPct val="125000"/>
               </a:lnSpc>
               <a:buNone/>
             </a:pPr>
@@ -12521,6 +12530,7 @@
 </file>
 
 <file path=ppt/slides/slide19.xml><?xml version="1.0" encoding="utf-8"?>
+<!-- AI-CHANGE-CONSOLE-POC-SLIDE -->
 <p:sld xmlns:a="http://schemas.openxmlformats.org/drawingml/2006/main" xmlns:r="http://schemas.openxmlformats.org/officeDocument/2006/relationships" xmlns:p="http://schemas.openxmlformats.org/presentationml/2006/main">
   <p:cSld>
     <p:bg>
@@ -18318,6 +18328,7 @@
 </file>
 
 <file path=ppt/slides/slide20.xml><?xml version="1.0" encoding="utf-8"?>
+<!-- AI-CHANGE-CONSOLE-POC-SLIDE -->
 <p:sld xmlns:a="http://schemas.openxmlformats.org/drawingml/2006/main" xmlns:r="http://schemas.openxmlformats.org/officeDocument/2006/relationships" xmlns:p="http://schemas.openxmlformats.org/presentationml/2006/main">
   <p:cSld>
     <p:bg>
@@ -18586,7 +18597,7 @@
           <a:p>
             <a:pPr marL="0" indent="0" algn="l">
               <a:lnSpc>
-                <a:spcPct val="1250"/>
+                <a:spcPct val="125000"/>
               </a:lnSpc>
               <a:buNone/>
             </a:pPr>
@@ -18734,7 +18745,7 @@
           <a:p>
             <a:pPr marL="0" indent="0" algn="l">
               <a:lnSpc>
-                <a:spcPct val="1250"/>
+                <a:spcPct val="125000"/>
               </a:lnSpc>
               <a:buNone/>
             </a:pPr>
@@ -18882,7 +18893,7 @@
           <a:p>
             <a:pPr marL="0" indent="0" algn="l">
               <a:lnSpc>
-                <a:spcPct val="1250"/>
+                <a:spcPct val="125000"/>
               </a:lnSpc>
               <a:buNone/>
             </a:pPr>
@@ -19030,7 +19041,7 @@
           <a:p>
             <a:pPr marL="0" indent="0" algn="l">
               <a:lnSpc>
-                <a:spcPct val="1250"/>
+                <a:spcPct val="125000"/>
               </a:lnSpc>
               <a:buNone/>
             </a:pPr>
@@ -19178,7 +19189,7 @@
           <a:p>
             <a:pPr marL="0" indent="0" algn="l">
               <a:lnSpc>
-                <a:spcPct val="1250"/>
+                <a:spcPct val="125000"/>
               </a:lnSpc>
               <a:buNone/>
             </a:pPr>
@@ -19326,7 +19337,7 @@
           <a:p>
             <a:pPr marL="0" indent="0" algn="l">
               <a:lnSpc>
-                <a:spcPct val="1250"/>
+                <a:spcPct val="125000"/>
               </a:lnSpc>
               <a:buNone/>
             </a:pPr>
@@ -19398,7 +19409,7 @@
           <a:p>
             <a:pPr marL="0" indent="0" algn="l">
               <a:lnSpc>
-                <a:spcPct val="1300"/>
+                <a:spcPct val="130000"/>
               </a:lnSpc>
               <a:buNone/>
             </a:pPr>
@@ -19439,7 +19450,7 @@
           <a:p>
             <a:pPr marL="0" indent="0" algn="l">
               <a:lnSpc>
-                <a:spcPct val="1300"/>
+                <a:spcPct val="130000"/>
               </a:lnSpc>
               <a:buNone/>
             </a:pPr>
@@ -19466,6 +19477,7 @@
 </file>
 
 <file path=ppt/slides/slide21.xml><?xml version="1.0" encoding="utf-8"?>
+<!-- AI-CHANGE-CONSOLE-POC-SLIDE -->
 <p:sld xmlns:a="http://schemas.openxmlformats.org/drawingml/2006/main" xmlns:r="http://schemas.openxmlformats.org/officeDocument/2006/relationships" xmlns:p="http://schemas.openxmlformats.org/presentationml/2006/main">
   <p:cSld>
     <p:bg>
@@ -19754,7 +19766,7 @@
           <a:p>
             <a:pPr marL="0" indent="0" algn="l">
               <a:lnSpc>
-                <a:spcPct val="1200"/>
+                <a:spcPct val="120000"/>
               </a:lnSpc>
               <a:buNone/>
             </a:pPr>
@@ -19824,7 +19836,7 @@
           <a:p>
             <a:pPr marL="0" indent="0" algn="l">
               <a:lnSpc>
-                <a:spcPct val="1200"/>
+                <a:spcPct val="120000"/>
               </a:lnSpc>
               <a:buNone/>
             </a:pPr>
@@ -19894,7 +19906,7 @@
           <a:p>
             <a:pPr marL="0" indent="0" algn="l">
               <a:lnSpc>
-                <a:spcPct val="1200"/>
+                <a:spcPct val="120000"/>
               </a:lnSpc>
               <a:buNone/>
             </a:pPr>
@@ -19964,7 +19976,7 @@
           <a:p>
             <a:pPr marL="0" indent="0" algn="l">
               <a:lnSpc>
-                <a:spcPct val="1200"/>
+                <a:spcPct val="120000"/>
               </a:lnSpc>
               <a:buNone/>
             </a:pPr>
@@ -20034,7 +20046,7 @@
           <a:p>
             <a:pPr marL="0" indent="0" algn="l">
               <a:lnSpc>
-                <a:spcPct val="1200"/>
+                <a:spcPct val="120000"/>
               </a:lnSpc>
               <a:buNone/>
             </a:pPr>
@@ -20104,7 +20116,7 @@
           <a:p>
             <a:pPr marL="0" indent="0" algn="l">
               <a:lnSpc>
-                <a:spcPct val="1200"/>
+                <a:spcPct val="120000"/>
               </a:lnSpc>
               <a:buNone/>
             </a:pPr>
@@ -20174,7 +20186,7 @@
           <a:p>
             <a:pPr marL="0" indent="0" algn="l">
               <a:lnSpc>
-                <a:spcPct val="1200"/>
+                <a:spcPct val="120000"/>
               </a:lnSpc>
               <a:buNone/>
             </a:pPr>
@@ -20244,7 +20256,7 @@
           <a:p>
             <a:pPr marL="0" indent="0" algn="l">
               <a:lnSpc>
-                <a:spcPct val="1200"/>
+                <a:spcPct val="120000"/>
               </a:lnSpc>
               <a:buNone/>
             </a:pPr>
@@ -20412,7 +20424,7 @@
           <a:p>
             <a:pPr marL="0" indent="0" algn="l">
               <a:lnSpc>
-                <a:spcPct val="1200"/>
+                <a:spcPct val="120000"/>
               </a:lnSpc>
               <a:buNone/>
             </a:pPr>
@@ -20482,7 +20494,7 @@
           <a:p>
             <a:pPr marL="0" indent="0" algn="l">
               <a:lnSpc>
-                <a:spcPct val="1200"/>
+                <a:spcPct val="120000"/>
               </a:lnSpc>
               <a:buNone/>
             </a:pPr>
@@ -20552,7 +20564,7 @@
           <a:p>
             <a:pPr marL="0" indent="0" algn="l">
               <a:lnSpc>
-                <a:spcPct val="1200"/>
+                <a:spcPct val="120000"/>
               </a:lnSpc>
               <a:buNone/>
             </a:pPr>
@@ -20622,7 +20634,7 @@
           <a:p>
             <a:pPr marL="0" indent="0" algn="l">
               <a:lnSpc>
-                <a:spcPct val="1200"/>
+                <a:spcPct val="120000"/>
               </a:lnSpc>
               <a:buNone/>
             </a:pPr>
@@ -20692,7 +20704,7 @@
           <a:p>
             <a:pPr marL="0" indent="0" algn="l">
               <a:lnSpc>
-                <a:spcPct val="1200"/>
+                <a:spcPct val="120000"/>
               </a:lnSpc>
               <a:buNone/>
             </a:pPr>
@@ -20762,7 +20774,7 @@
           <a:p>
             <a:pPr marL="0" indent="0" algn="l">
               <a:lnSpc>
-                <a:spcPct val="1200"/>
+                <a:spcPct val="120000"/>
               </a:lnSpc>
               <a:buNone/>
             </a:pPr>
@@ -20832,7 +20844,7 @@
           <a:p>
             <a:pPr marL="0" indent="0" algn="l">
               <a:lnSpc>
-                <a:spcPct val="1200"/>
+                <a:spcPct val="120000"/>
               </a:lnSpc>
               <a:buNone/>
             </a:pPr>
@@ -20942,7 +20954,7 @@
           <a:p>
             <a:pPr marL="0" indent="0" algn="l">
               <a:lnSpc>
-                <a:spcPct val="1300"/>
+                <a:spcPct val="130000"/>
               </a:lnSpc>
               <a:buNone/>
             </a:pPr>
@@ -51367,6 +51379,7 @@
 </file>
 
 <file path=ppt/slides/slide9.xml><?xml version="1.0" encoding="utf-8"?>
+<!-- AI-CHANGE-CONSOLE-POC-SLIDE -->
 <p:sld xmlns:a="http://schemas.openxmlformats.org/drawingml/2006/main" xmlns:r="http://schemas.openxmlformats.org/officeDocument/2006/relationships" xmlns:p="http://schemas.openxmlformats.org/presentationml/2006/main">
   <p:cSld>
     <p:bg>
@@ -51490,7 +51503,7 @@
           <a:p>
             <a:pPr marL="0" indent="0" algn="l">
               <a:lnSpc>
-                <a:spcPct val="1350"/>
+                <a:spcPct val="135000"/>
               </a:lnSpc>
               <a:buNone/>
             </a:pPr>
